--- a/assets/pptx/catalog-438.pptx
+++ b/assets/pptx/catalog-438.pptx
@@ -3247,7 +3247,7 @@
                 <a:ea typeface="Ebrima"/>
                 <a:cs typeface="Ebrima"/>
               </a:rPr>
-              <a:t>ምነው (Track 10)</a:t>
+              <a:t>ምነው Track 10</a:t>
             </a:r>
           </a:p>
         </p:txBody>
@@ -3314,7 +3314,7 @@
                 <a:ea typeface="Ebrima"/>
                 <a:cs typeface="Ebrima"/>
               </a:rPr>
-              <a:t>(ምነው ምነው ምነው ምነው እየሱስ እያለ ልብህ ያዘነው</a:t>
+              <a:t>ምነው ምነው ምነው ምነው እየሱስ እያለ ልብህ ያዘነው</a:t>
             </a:r>
           </a:p>
           <a:p>
@@ -3332,7 +3332,7 @@
                 <a:ea typeface="Ebrima"/>
                 <a:cs typeface="Ebrima"/>
               </a:rPr>
-              <a:t>ምነው ምነው ምነው ምነው እግዚአብሔር እያለ ልብሽ ያዘነው)</a:t>
+              <a:t>ምነው ምነው ምነው ምነው እግዚአብሔር እያለ ልብሽ ያዘነው</a:t>
             </a:r>
           </a:p>
         </p:txBody>
@@ -3682,7 +3682,7 @@
                 <a:ea typeface="Ebrima"/>
                 <a:cs typeface="Ebrima"/>
               </a:rPr>
-              <a:t>ተፈፅሞ አየን አንዳች ሳትቀር (2x)</a:t>
+              <a:t>ተፈፅሞ አየን አንዳች ሳትቀር 2x</a:t>
             </a:r>
           </a:p>
         </p:txBody>
@@ -3749,7 +3749,7 @@
                 <a:ea typeface="Ebrima"/>
                 <a:cs typeface="Ebrima"/>
               </a:rPr>
-              <a:t>(ኦሆ አሆሆሆ አሀሀሀ)</a:t>
+              <a:t>ኦሆ አሆሆሆ አሀሀሀ</a:t>
             </a:r>
           </a:p>
         </p:txBody>
@@ -3996,7 +3996,7 @@
                 <a:ea typeface="Ebrima"/>
                 <a:cs typeface="Ebrima"/>
               </a:rPr>
-              <a:t>ፀንተህ ስትጠብቀው ፍፃሜው አይቀር (2x)</a:t>
+              <a:t>ፀንተህ ስትጠብቀው ፍፃሜው አይቀር 2x</a:t>
             </a:r>
           </a:p>
         </p:txBody>
@@ -4081,7 +4081,7 @@
                 <a:ea typeface="Ebrima"/>
                 <a:cs typeface="Ebrima"/>
               </a:rPr>
-              <a:t>ምነው ምነው ምነው ምነው እግዚአብሔር እያለ ልብሽ ያዘነው (3x)</a:t>
+              <a:t>ምነው ምነው ምነው ምነው እግዚአብሔር እያለ ልብሽ ያዘነው 3x</a:t>
             </a:r>
           </a:p>
         </p:txBody>
